--- a/assets/figures-editable/c3-c4/c3-e23.pptx
+++ b/assets/figures-editable/c3-c4/c3-e23.pptx
@@ -3104,8 +3104,8 @@
         </p:nvSpPr>
         <p:spPr>
           <a:xfrm>
-            <a:off x="274320" y="137160"/>
-            <a:ext cx="11612880" cy="365760"/>
+            <a:off x="274320" y="118872"/>
+            <a:ext cx="11612880" cy="340105"/>
           </a:xfrm>
           <a:prstGeom prst="rect">
             <a:avLst/>
@@ -3114,7 +3114,7 @@
           <a:effectLst/>
         </p:spPr>
         <p:txBody>
-          <a:bodyPr wrap="square" lIns="27432" rIns="27432" tIns="18288" bIns="18288" anchor="ctr">
+          <a:bodyPr wrap="none" lIns="18288" rIns="18288" tIns="18288" bIns="18288" anchor="t">
             <a:spAutoFit/>
           </a:bodyPr>
           <a:lstStyle/>
@@ -3125,7 +3125,7 @@
               </a:spcAft>
             </a:pPr>
             <a:r>
-              <a:rPr sz="2100" b="0" i="0">
+              <a:rPr sz="1900" b="1" i="0">
                 <a:solidFill>
                   <a:srgbClr val="8EDBD4"/>
                 </a:solidFill>
@@ -3138,24 +3138,24 @@
       </p:sp>
       <p:sp>
         <p:nvSpPr>
-          <p:cNvPr id="3" name="C3-E23 rect 1" descr="sci-ppt:o001"/>
+          <p:cNvPr id="3" name="C3-E23 round_rect 1" descr="sci-ppt:o001"/>
           <p:cNvSpPr/>
           <p:nvPr/>
         </p:nvSpPr>
         <p:spPr>
           <a:xfrm>
-            <a:off x="731520" y="1508760"/>
-            <a:ext cx="4937760" cy="731520"/>
-          </a:xfrm>
-          <a:prstGeom prst="rect">
+            <a:off x="365760" y="914400"/>
+            <a:ext cx="6035040" cy="4846320"/>
+          </a:xfrm>
+          <a:prstGeom prst="roundRect">
             <a:avLst/>
           </a:prstGeom>
           <a:solidFill>
             <a:srgbClr val="213E4B"/>
           </a:solidFill>
-          <a:ln w="19050">
+          <a:ln w="20320">
             <a:solidFill>
-              <a:srgbClr val="B4C7D2"/>
+              <a:srgbClr val="8EDBD4"/>
             </a:solidFill>
           </a:ln>
           <a:effectLst/>
@@ -3168,21 +3168,93 @@
           </a:p>
         </p:txBody>
       </p:sp>
+      <p:sp>
+        <p:nvSpPr>
+          <p:cNvPr id="4" name="C3-E23 text 2" descr="sci-ppt:o002"/>
+          <p:cNvSpPr txBox="1"/>
+          <p:nvPr/>
+        </p:nvSpPr>
+        <p:spPr>
+          <a:xfrm>
+            <a:off x="475488" y="969264"/>
+            <a:ext cx="5815583" cy="254889"/>
+          </a:xfrm>
+          <a:prstGeom prst="rect">
+            <a:avLst/>
+          </a:prstGeom>
+          <a:noFill/>
+          <a:effectLst/>
+        </p:spPr>
+        <p:txBody>
+          <a:bodyPr wrap="none" lIns="18288" rIns="18288" tIns="18288" bIns="18288" anchor="t">
+            <a:spAutoFit/>
+          </a:bodyPr>
+          <a:lstStyle/>
+          <a:p>
+            <a:pPr algn="l">
+              <a:spcAft>
+                <a:spcPts val="0"/>
+              </a:spcAft>
+            </a:pPr>
+            <a:r>
+              <a:rPr sz="1350" b="1" i="0">
+                <a:solidFill>
+                  <a:srgbClr val="8EDBD4"/>
+                </a:solidFill>
+                <a:latin typeface="Arial"/>
+              </a:rPr>
+              <a:t>Steady redirection of a jet</a:t>
+            </a:r>
+          </a:p>
+        </p:txBody>
+      </p:sp>
+      <p:sp>
+        <p:nvSpPr>
+          <p:cNvPr id="5" name="C3-E23 rect 3" descr="sci-ppt:o003"/>
+          <p:cNvSpPr/>
+          <p:nvPr/>
+        </p:nvSpPr>
+        <p:spPr>
+          <a:xfrm>
+            <a:off x="2011680" y="1417320"/>
+            <a:ext cx="914400" cy="1828800"/>
+          </a:xfrm>
+          <a:prstGeom prst="rect">
+            <a:avLst/>
+          </a:prstGeom>
+          <a:solidFill>
+            <a:srgbClr val="1E4A5A"/>
+          </a:solidFill>
+          <a:ln w="27940">
+            <a:solidFill>
+              <a:srgbClr val="8EDBD4"/>
+            </a:solidFill>
+          </a:ln>
+          <a:effectLst/>
+        </p:spPr>
+        <p:txBody>
+          <a:bodyPr rtlCol="0" anchor="ctr"/>
+          <a:lstStyle/>
+          <a:p>
+            <a:pPr algn="ctr"/>
+          </a:p>
+        </p:txBody>
+      </p:sp>
       <p:cxnSp>
         <p:nvCxnSpPr>
-          <p:cNvPr id="4" name="C3-E23 arrow 2" descr="sci-ppt:o002"/>
+          <p:cNvPr id="6" name="C3-E23 arrow 4" descr="sci-ppt:o004"/>
           <p:cNvCxnSpPr/>
           <p:nvPr/>
         </p:nvCxnSpPr>
         <p:spPr>
           <a:xfrm>
-            <a:off x="1005840" y="1874519"/>
-            <a:ext cx="4297680" cy="0"/>
+            <a:off x="2468880" y="1371600"/>
+            <a:ext cx="0" cy="1783080"/>
           </a:xfrm>
           <a:prstGeom prst="line">
             <a:avLst/>
           </a:prstGeom>
-          <a:ln w="25400">
+          <a:ln w="44450">
             <a:solidFill>
               <a:srgbClr val="8EDBD4"/>
             </a:solidFill>
@@ -3194,14 +3266,14 @@
       </p:cxnSp>
       <p:sp>
         <p:nvSpPr>
-          <p:cNvPr id="5" name="C3-E23 text 3" descr="sci-ppt:o003"/>
+          <p:cNvPr id="7" name="C3-E23 text 5" descr="sci-ppt:o005"/>
           <p:cNvSpPr txBox="1"/>
           <p:nvPr/>
         </p:nvSpPr>
         <p:spPr>
           <a:xfrm>
-            <a:off x="1463040" y="1051560"/>
-            <a:ext cx="3931920" cy="365760"/>
+            <a:off x="3063240" y="2011680"/>
+            <a:ext cx="3108960" cy="247142"/>
           </a:xfrm>
           <a:prstGeom prst="rect">
             <a:avLst/>
@@ -3210,7 +3282,7 @@
           <a:effectLst/>
         </p:spPr>
         <p:txBody>
-          <a:bodyPr wrap="square" lIns="27432" rIns="27432" tIns="18288" bIns="18288" anchor="ctr">
+          <a:bodyPr wrap="none" lIns="18288" rIns="18288" tIns="18288" bIns="18288" anchor="t">
             <a:spAutoFit/>
           </a:bodyPr>
           <a:lstStyle/>
@@ -3221,49 +3293,187 @@
               </a:spcAft>
             </a:pPr>
             <a:r>
-              <a:rPr sz="1800" b="0" i="0">
+              <a:rPr sz="1300" b="1" i="0">
+                <a:solidFill>
+                  <a:srgbClr val="8EDBD4"/>
+                </a:solidFill>
+                <a:latin typeface="Arial"/>
+              </a:rPr>
+              <a:t>Uⱼ, Aⱼ</a:t>
+            </a:r>
+          </a:p>
+        </p:txBody>
+      </p:sp>
+      <p:sp>
+        <p:nvSpPr>
+          <p:cNvPr id="8" name="C3-E23 rect 6" descr="sci-ppt:o006"/>
+          <p:cNvSpPr/>
+          <p:nvPr/>
+        </p:nvSpPr>
+        <p:spPr>
+          <a:xfrm>
+            <a:off x="914400" y="3291840"/>
+            <a:ext cx="4754880" cy="274320"/>
+          </a:xfrm>
+          <a:prstGeom prst="rect">
+            <a:avLst/>
+          </a:prstGeom>
+          <a:solidFill>
+            <a:srgbClr val="3A5362"/>
+          </a:solidFill>
+          <a:ln w="17780">
+            <a:solidFill>
+              <a:srgbClr val="B4C7D2"/>
+            </a:solidFill>
+          </a:ln>
+          <a:effectLst/>
+        </p:spPr>
+        <p:txBody>
+          <a:bodyPr rtlCol="0" anchor="ctr"/>
+          <a:lstStyle/>
+          <a:p>
+            <a:pPr algn="ctr"/>
+          </a:p>
+        </p:txBody>
+      </p:sp>
+      <p:cxnSp>
+        <p:nvCxnSpPr>
+          <p:cNvPr id="9" name="C3-E23 arrow 7" descr="sci-ppt:o007"/>
+          <p:cNvCxnSpPr/>
+          <p:nvPr/>
+        </p:nvCxnSpPr>
+        <p:spPr>
+          <a:xfrm flipH="1" flipV="1">
+            <a:off x="274320" y="3154680"/>
+            <a:ext cx="1645920" cy="91440"/>
+          </a:xfrm>
+          <a:prstGeom prst="line">
+            <a:avLst/>
+          </a:prstGeom>
+          <a:ln w="44450">
+            <a:solidFill>
+              <a:srgbClr val="F2B880"/>
+            </a:solidFill>
+            <a:headEnd type="none" w="med" len="med"/>
+            <a:tailEnd type="triangle" w="med" len="med"/>
+          </a:ln>
+          <a:effectLst/>
+        </p:spPr>
+      </p:cxnSp>
+      <p:cxnSp>
+        <p:nvCxnSpPr>
+          <p:cNvPr id="10" name="C3-E23 arrow 8" descr="sci-ppt:o008"/>
+          <p:cNvCxnSpPr/>
+          <p:nvPr/>
+        </p:nvCxnSpPr>
+        <p:spPr>
+          <a:xfrm flipV="1">
+            <a:off x="3017520" y="3154680"/>
+            <a:ext cx="1645920" cy="91440"/>
+          </a:xfrm>
+          <a:prstGeom prst="line">
+            <a:avLst/>
+          </a:prstGeom>
+          <a:ln w="44450">
+            <a:solidFill>
+              <a:srgbClr val="F2B880"/>
+            </a:solidFill>
+            <a:headEnd type="none" w="med" len="med"/>
+            <a:tailEnd type="triangle" w="med" len="med"/>
+          </a:ln>
+          <a:effectLst/>
+        </p:spPr>
+      </p:cxnSp>
+      <p:sp>
+        <p:nvSpPr>
+          <p:cNvPr id="11" name="C3-E23 text 9" descr="sci-ppt:o009"/>
+          <p:cNvSpPr txBox="1"/>
+          <p:nvPr/>
+        </p:nvSpPr>
+        <p:spPr>
+          <a:xfrm>
+            <a:off x="914400" y="3749039"/>
+            <a:ext cx="5303520" cy="231648"/>
+          </a:xfrm>
+          <a:prstGeom prst="rect">
+            <a:avLst/>
+          </a:prstGeom>
+          <a:noFill/>
+          <a:effectLst/>
+        </p:spPr>
+        <p:txBody>
+          <a:bodyPr wrap="none" lIns="18288" rIns="18288" tIns="18288" bIns="18288" anchor="t">
+            <a:spAutoFit/>
+          </a:bodyPr>
+          <a:lstStyle/>
+          <a:p>
+            <a:pPr algn="l">
+              <a:spcAft>
+                <a:spcPts val="0"/>
+              </a:spcAft>
+            </a:pPr>
+            <a:r>
+              <a:rPr sz="1200" b="1" i="0">
+                <a:solidFill>
+                  <a:srgbClr val="F2B880"/>
+                </a:solidFill>
+                <a:latin typeface="Arial"/>
+              </a:rPr>
+              <a:t>all axial momentum is removed; liquid leaves sideways</a:t>
+            </a:r>
+          </a:p>
+        </p:txBody>
+      </p:sp>
+      <p:sp>
+        <p:nvSpPr>
+          <p:cNvPr id="12" name="C3-E23 text 10" descr="sci-ppt:o010"/>
+          <p:cNvSpPr txBox="1"/>
+          <p:nvPr/>
+        </p:nvSpPr>
+        <p:spPr>
+          <a:xfrm>
+            <a:off x="548640" y="4206240"/>
+            <a:ext cx="5669280" cy="247142"/>
+          </a:xfrm>
+          <a:prstGeom prst="rect">
+            <a:avLst/>
+          </a:prstGeom>
+          <a:noFill/>
+          <a:effectLst/>
+        </p:spPr>
+        <p:txBody>
+          <a:bodyPr wrap="none" lIns="18288" rIns="18288" tIns="18288" bIns="18288" anchor="t">
+            <a:spAutoFit/>
+          </a:bodyPr>
+          <a:lstStyle/>
+          <a:p>
+            <a:pPr algn="l">
+              <a:spcAft>
+                <a:spcPts val="0"/>
+              </a:spcAft>
+            </a:pPr>
+            <a:r>
+              <a:rPr sz="1300" b="1" i="0">
                 <a:solidFill>
                   <a:srgbClr val="E7F0F3"/>
                 </a:solidFill>
                 <a:latin typeface="Arial"/>
               </a:rPr>
-              <a:t>Finite emitted liquid: m_j, E_j, U_j</a:t>
-            </a:r>
-          </a:p>
-        </p:txBody>
-      </p:sp>
-      <p:cxnSp>
-        <p:nvCxnSpPr>
-          <p:cNvPr id="6" name="C3-E23 line 4" descr="sci-ppt:o004"/>
-          <p:cNvCxnSpPr/>
-          <p:nvPr/>
-        </p:nvCxnSpPr>
-        <p:spPr>
-          <a:xfrm>
-            <a:off x="731520" y="2606040"/>
-            <a:ext cx="4937760" cy="0"/>
-          </a:xfrm>
-          <a:prstGeom prst="line">
-            <a:avLst/>
-          </a:prstGeom>
-          <a:ln w="25400">
-            <a:solidFill>
-              <a:srgbClr val="8EDBD4"/>
-            </a:solidFill>
-          </a:ln>
-          <a:effectLst/>
-        </p:spPr>
-      </p:cxnSp>
-      <p:sp>
-        <p:nvSpPr>
-          <p:cNvPr id="7" name="C3-E23 text 5" descr="sci-ppt:o005"/>
+              <a:t>qⱼ = ½ρUⱼ²,   ṁ = ρA_jUⱼ</a:t>
+            </a:r>
+          </a:p>
+        </p:txBody>
+      </p:sp>
+      <p:sp>
+        <p:nvSpPr>
+          <p:cNvPr id="13" name="C3-E23 text 11" descr="sci-ppt:o011"/>
           <p:cNvSpPr txBox="1"/>
           <p:nvPr/>
         </p:nvSpPr>
         <p:spPr>
           <a:xfrm>
-            <a:off x="2743200" y="2697480"/>
-            <a:ext cx="1828800" cy="365760"/>
+            <a:off x="548640" y="4617720"/>
+            <a:ext cx="5669280" cy="262636"/>
           </a:xfrm>
           <a:prstGeom prst="rect">
             <a:avLst/>
@@ -3272,7 +3482,7 @@
           <a:effectLst/>
         </p:spPr>
         <p:txBody>
-          <a:bodyPr wrap="square" lIns="27432" rIns="27432" tIns="18288" bIns="18288" anchor="ctr">
+          <a:bodyPr wrap="none" lIns="18288" rIns="18288" tIns="18288" bIns="18288" anchor="t">
             <a:spAutoFit/>
           </a:bodyPr>
           <a:lstStyle/>
@@ -3283,49 +3493,183 @@
               </a:spcAft>
             </a:pPr>
             <a:r>
-              <a:rPr sz="1700" b="0" i="0">
+              <a:rPr sz="1400" b="1" i="0">
+                <a:solidFill>
+                  <a:srgbClr val="F2B880"/>
+                </a:solidFill>
+                <a:latin typeface="Arial"/>
+              </a:rPr>
+              <a:t>F_steady = ṁUⱼ = ρA_jUⱼ² = 2 qⱼ Aⱼ</a:t>
+            </a:r>
+          </a:p>
+        </p:txBody>
+      </p:sp>
+      <p:sp>
+        <p:nvSpPr>
+          <p:cNvPr id="14" name="C3-E23 text 12" descr="sci-ppt:o012"/>
+          <p:cNvSpPr txBox="1"/>
+          <p:nvPr/>
+        </p:nvSpPr>
+        <p:spPr>
+          <a:xfrm>
+            <a:off x="548640" y="5074920"/>
+            <a:ext cx="5669280" cy="231648"/>
+          </a:xfrm>
+          <a:prstGeom prst="rect">
+            <a:avLst/>
+          </a:prstGeom>
+          <a:noFill/>
+          <a:effectLst/>
+        </p:spPr>
+        <p:txBody>
+          <a:bodyPr wrap="none" lIns="18288" rIns="18288" tIns="18288" bIns="18288" anchor="t">
+            <a:spAutoFit/>
+          </a:bodyPr>
+          <a:lstStyle/>
+          <a:p>
+            <a:pPr algn="l">
+              <a:spcAft>
+                <a:spcPts val="0"/>
+              </a:spcAft>
+            </a:pPr>
+            <a:r>
+              <a:rPr sz="1200" b="0" i="0">
+                <a:solidFill>
+                  <a:srgbClr val="B4C7D2"/>
+                </a:solidFill>
+                <a:latin typeface="Arial"/>
+              </a:rPr>
+              <a:t>Aⱼ = π(5 µm)² → F = 80 µN</a:t>
+            </a:r>
+          </a:p>
+        </p:txBody>
+      </p:sp>
+      <p:sp>
+        <p:nvSpPr>
+          <p:cNvPr id="15" name="C3-E23 text 13" descr="sci-ppt:o013"/>
+          <p:cNvSpPr txBox="1"/>
+          <p:nvPr/>
+        </p:nvSpPr>
+        <p:spPr>
+          <a:xfrm>
+            <a:off x="6583680" y="960120"/>
+            <a:ext cx="5212080" cy="254889"/>
+          </a:xfrm>
+          <a:prstGeom prst="rect">
+            <a:avLst/>
+          </a:prstGeom>
+          <a:noFill/>
+          <a:effectLst/>
+        </p:spPr>
+        <p:txBody>
+          <a:bodyPr wrap="none" lIns="18288" rIns="18288" tIns="18288" bIns="18288" anchor="t">
+            <a:spAutoFit/>
+          </a:bodyPr>
+          <a:lstStyle/>
+          <a:p>
+            <a:pPr algn="l">
+              <a:spcAft>
+                <a:spcPts val="0"/>
+              </a:spcAft>
+            </a:pPr>
+            <a:r>
+              <a:rPr sz="1350" b="1" i="0">
+                <a:solidFill>
+                  <a:srgbClr val="8EDBD4"/>
+                </a:solidFill>
+                <a:latin typeface="Arial"/>
+              </a:rPr>
+              <a:t>Two very different pressure scales (MPa, log axis)</a:t>
+            </a:r>
+          </a:p>
+        </p:txBody>
+      </p:sp>
+      <p:sp>
+        <p:nvSpPr>
+          <p:cNvPr id="16" name="C3-E23 text 14" descr="sci-ppt:o014"/>
+          <p:cNvSpPr txBox="1"/>
+          <p:nvPr/>
+        </p:nvSpPr>
+        <p:spPr>
+          <a:xfrm>
+            <a:off x="6583680" y="1572768"/>
+            <a:ext cx="2468879" cy="231648"/>
+          </a:xfrm>
+          <a:prstGeom prst="rect">
+            <a:avLst/>
+          </a:prstGeom>
+          <a:noFill/>
+          <a:effectLst/>
+        </p:spPr>
+        <p:txBody>
+          <a:bodyPr wrap="none" lIns="18288" rIns="18288" tIns="18288" bIns="18288" anchor="t">
+            <a:spAutoFit/>
+          </a:bodyPr>
+          <a:lstStyle/>
+          <a:p>
+            <a:pPr algn="l">
+              <a:spcAft>
+                <a:spcPts val="0"/>
+              </a:spcAft>
+            </a:pPr>
+            <a:r>
+              <a:rPr sz="1200" b="0" i="0">
                 <a:solidFill>
                   <a:srgbClr val="E7F0F3"/>
                 </a:solidFill>
                 <a:latin typeface="Arial"/>
               </a:rPr>
-              <a:t>L_j</a:t>
-            </a:r>
-          </a:p>
-        </p:txBody>
-      </p:sp>
-      <p:cxnSp>
-        <p:nvCxnSpPr>
-          <p:cNvPr id="8" name="C3-E23 line 6" descr="sci-ppt:o006"/>
-          <p:cNvCxnSpPr/>
+              <a:t>qⱼ = ½ρUⱼ²</a:t>
+            </a:r>
+          </a:p>
+        </p:txBody>
+      </p:sp>
+      <p:sp>
+        <p:nvSpPr>
+          <p:cNvPr id="17" name="C3-E23 rect 15" descr="sci-ppt:o015"/>
+          <p:cNvSpPr/>
           <p:nvPr/>
-        </p:nvCxnSpPr>
+        </p:nvSpPr>
         <p:spPr>
           <a:xfrm>
-            <a:off x="457200" y="1508760"/>
-            <a:ext cx="0" cy="731520"/>
-          </a:xfrm>
-          <a:prstGeom prst="line">
+            <a:off x="9144000" y="1554480"/>
+            <a:ext cx="323226" cy="457200"/>
+          </a:xfrm>
+          <a:prstGeom prst="rect">
             <a:avLst/>
           </a:prstGeom>
-          <a:ln w="25400">
+          <a:solidFill>
+            <a:srgbClr val="7FC8F8">
+              <a:alpha val="85000"/>
+            </a:srgbClr>
+          </a:solidFill>
+          <a:ln w="12700">
             <a:solidFill>
-              <a:srgbClr val="8EDBD4"/>
+              <a:srgbClr val="7FC8F8">
+                <a:alpha val="85000"/>
+              </a:srgbClr>
             </a:solidFill>
           </a:ln>
           <a:effectLst/>
         </p:spPr>
-      </p:cxnSp>
-      <p:sp>
-        <p:nvSpPr>
-          <p:cNvPr id="9" name="C3-E23 text 7" descr="sci-ppt:o007"/>
+        <p:txBody>
+          <a:bodyPr rtlCol="0" anchor="ctr"/>
+          <a:lstStyle/>
+          <a:p>
+            <a:pPr algn="ctr"/>
+          </a:p>
+        </p:txBody>
+      </p:sp>
+      <p:sp>
+        <p:nvSpPr>
+          <p:cNvPr id="18" name="C3-E23 text 16" descr="sci-ppt:o016"/>
           <p:cNvSpPr txBox="1"/>
           <p:nvPr/>
         </p:nvSpPr>
         <p:spPr>
           <a:xfrm>
-            <a:off x="137160" y="2377440"/>
-            <a:ext cx="1645920" cy="320040"/>
+            <a:off x="9540378" y="1600200"/>
+            <a:ext cx="1371600" cy="231648"/>
           </a:xfrm>
           <a:prstGeom prst="rect">
             <a:avLst/>
@@ -3334,7 +3678,7 @@
           <a:effectLst/>
         </p:spPr>
         <p:txBody>
-          <a:bodyPr wrap="square" lIns="27432" rIns="27432" tIns="18288" bIns="18288" anchor="ctr">
+          <a:bodyPr wrap="none" lIns="18288" rIns="18288" tIns="18288" bIns="18288" anchor="t">
             <a:spAutoFit/>
           </a:bodyPr>
           <a:lstStyle/>
@@ -3345,131 +3689,27 @@
               </a:spcAft>
             </a:pPr>
             <a:r>
-              <a:rPr sz="1400" b="0" i="0">
+              <a:rPr sz="1200" b="1" i="0">
                 <a:solidFill>
                   <a:srgbClr val="E7F0F3"/>
                 </a:solidFill>
                 <a:latin typeface="Arial"/>
               </a:rPr>
-              <a:t>d_j = 2a_j</a:t>
-            </a:r>
-          </a:p>
-        </p:txBody>
-      </p:sp>
-      <p:sp>
-        <p:nvSpPr>
-          <p:cNvPr id="10" name="C3-E23 rect 8" descr="sci-ppt:o008"/>
-          <p:cNvSpPr/>
-          <p:nvPr/>
-        </p:nvSpPr>
-        <p:spPr>
-          <a:xfrm>
-            <a:off x="8412480" y="960120"/>
-            <a:ext cx="365760" cy="2331720"/>
-          </a:xfrm>
-          <a:prstGeom prst="rect">
-            <a:avLst/>
-          </a:prstGeom>
-          <a:solidFill>
-            <a:srgbClr val="213E4B"/>
-          </a:solidFill>
-          <a:ln w="19050">
-            <a:solidFill>
-              <a:srgbClr val="B4C7D2"/>
-            </a:solidFill>
-          </a:ln>
-          <a:effectLst/>
-        </p:spPr>
-        <p:txBody>
-          <a:bodyPr rtlCol="0" anchor="ctr"/>
-          <a:lstStyle/>
-          <a:p>
-            <a:pPr algn="ctr"/>
-          </a:p>
-        </p:txBody>
-      </p:sp>
-      <p:cxnSp>
-        <p:nvCxnSpPr>
-          <p:cNvPr id="11" name="C3-E23 arrow 9" descr="sci-ppt:o009"/>
-          <p:cNvCxnSpPr/>
-          <p:nvPr/>
-        </p:nvCxnSpPr>
-        <p:spPr>
-          <a:xfrm>
-            <a:off x="5760720" y="1874519"/>
-            <a:ext cx="2606040" cy="0"/>
-          </a:xfrm>
-          <a:prstGeom prst="line">
-            <a:avLst/>
-          </a:prstGeom>
-          <a:ln w="25400">
-            <a:solidFill>
-              <a:srgbClr val="8EDBD4"/>
-            </a:solidFill>
-            <a:headEnd type="none" w="med" len="med"/>
-            <a:tailEnd type="triangle" w="med" len="med"/>
-          </a:ln>
-          <a:effectLst/>
-        </p:spPr>
-      </p:cxnSp>
-      <p:cxnSp>
-        <p:nvCxnSpPr>
-          <p:cNvPr id="12" name="C3-E23 arrow 10" descr="sci-ppt:o010"/>
-          <p:cNvCxnSpPr/>
-          <p:nvPr/>
-        </p:nvCxnSpPr>
-        <p:spPr>
-          <a:xfrm flipV="1">
-            <a:off x="8092440" y="868680"/>
-            <a:ext cx="0" cy="1005839"/>
-          </a:xfrm>
-          <a:prstGeom prst="line">
-            <a:avLst/>
-          </a:prstGeom>
-          <a:ln w="25400">
-            <a:solidFill>
-              <a:srgbClr val="8EDBD4"/>
-            </a:solidFill>
-            <a:headEnd type="none" w="med" len="med"/>
-            <a:tailEnd type="triangle" w="med" len="med"/>
-          </a:ln>
-          <a:effectLst/>
-        </p:spPr>
-      </p:cxnSp>
-      <p:cxnSp>
-        <p:nvCxnSpPr>
-          <p:cNvPr id="13" name="C3-E23 arrow 11" descr="sci-ppt:o011"/>
-          <p:cNvCxnSpPr/>
-          <p:nvPr/>
-        </p:nvCxnSpPr>
-        <p:spPr>
-          <a:xfrm>
-            <a:off x="8092440" y="1874519"/>
-            <a:ext cx="0" cy="1280161"/>
-          </a:xfrm>
-          <a:prstGeom prst="line">
-            <a:avLst/>
-          </a:prstGeom>
-          <a:ln w="25400">
-            <a:solidFill>
-              <a:srgbClr val="8EDBD4"/>
-            </a:solidFill>
-            <a:headEnd type="none" w="med" len="med"/>
-            <a:tailEnd type="triangle" w="med" len="med"/>
-          </a:ln>
-          <a:effectLst/>
-        </p:spPr>
-      </p:cxnSp>
-      <p:sp>
-        <p:nvSpPr>
-          <p:cNvPr id="14" name="C3-E23 text 12" descr="sci-ppt:o012"/>
+              <a:t>0.509 MPa</a:t>
+            </a:r>
+          </a:p>
+        </p:txBody>
+      </p:sp>
+      <p:sp>
+        <p:nvSpPr>
+          <p:cNvPr id="19" name="C3-E23 text 17" descr="sci-ppt:o017"/>
           <p:cNvSpPr txBox="1"/>
           <p:nvPr/>
         </p:nvSpPr>
         <p:spPr>
           <a:xfrm>
-            <a:off x="9006840" y="1280160"/>
-            <a:ext cx="2560320" cy="914400"/>
+            <a:off x="6583680" y="2304288"/>
+            <a:ext cx="2468879" cy="231648"/>
           </a:xfrm>
           <a:prstGeom prst="rect">
             <a:avLst/>
@@ -3478,7 +3718,7 @@
           <a:effectLst/>
         </p:spPr>
         <p:txBody>
-          <a:bodyPr wrap="square" lIns="27432" rIns="27432" tIns="18288" bIns="18288" anchor="ctr">
+          <a:bodyPr wrap="none" lIns="18288" rIns="18288" tIns="18288" bIns="18288" anchor="t">
             <a:spAutoFit/>
           </a:bodyPr>
           <a:lstStyle/>
@@ -3489,15 +3729,75 @@
               </a:spcAft>
             </a:pPr>
             <a:r>
-              <a:rPr sz="1600" b="0" i="0">
+              <a:rPr sz="1200" b="0" i="0">
                 <a:solidFill>
                   <a:srgbClr val="E7F0F3"/>
                 </a:solidFill>
                 <a:latin typeface="Arial"/>
               </a:rPr>
-              <a:t>Redirected flow</a:t>
-            </a:r>
-          </a:p>
+              <a:t>ρ c Uⱼ (early rigid contact)</a:t>
+            </a:r>
+          </a:p>
+        </p:txBody>
+      </p:sp>
+      <p:sp>
+        <p:nvSpPr>
+          <p:cNvPr id="20" name="C3-E23 rect 18" descr="sci-ppt:o018"/>
+          <p:cNvSpPr/>
+          <p:nvPr/>
+        </p:nvSpPr>
+        <p:spPr>
+          <a:xfrm>
+            <a:off x="9144000" y="2286000"/>
+            <a:ext cx="1222672" cy="457200"/>
+          </a:xfrm>
+          <a:prstGeom prst="rect">
+            <a:avLst/>
+          </a:prstGeom>
+          <a:solidFill>
+            <a:srgbClr val="F28BA0">
+              <a:alpha val="85000"/>
+            </a:srgbClr>
+          </a:solidFill>
+          <a:ln w="12700">
+            <a:solidFill>
+              <a:srgbClr val="F28BA0">
+                <a:alpha val="85000"/>
+              </a:srgbClr>
+            </a:solidFill>
+          </a:ln>
+          <a:effectLst/>
+        </p:spPr>
+        <p:txBody>
+          <a:bodyPr rtlCol="0" anchor="ctr"/>
+          <a:lstStyle/>
+          <a:p>
+            <a:pPr algn="ctr"/>
+          </a:p>
+        </p:txBody>
+      </p:sp>
+      <p:sp>
+        <p:nvSpPr>
+          <p:cNvPr id="21" name="C3-E23 text 19" descr="sci-ppt:o019"/>
+          <p:cNvSpPr txBox="1"/>
+          <p:nvPr/>
+        </p:nvSpPr>
+        <p:spPr>
+          <a:xfrm>
+            <a:off x="10439824" y="2331720"/>
+            <a:ext cx="1371600" cy="231648"/>
+          </a:xfrm>
+          <a:prstGeom prst="rect">
+            <a:avLst/>
+          </a:prstGeom>
+          <a:noFill/>
+          <a:effectLst/>
+        </p:spPr>
+        <p:txBody>
+          <a:bodyPr wrap="none" lIns="18288" rIns="18288" tIns="18288" bIns="18288" anchor="t">
+            <a:spAutoFit/>
+          </a:bodyPr>
+          <a:lstStyle/>
           <a:p>
             <a:pPr algn="l">
               <a:spcAft>
@@ -3505,15 +3805,39 @@
               </a:spcAft>
             </a:pPr>
             <a:r>
-              <a:rPr sz="1600" b="0" i="0">
+              <a:rPr sz="1200" b="1" i="0">
                 <a:solidFill>
                   <a:srgbClr val="E7F0F3"/>
                 </a:solidFill>
                 <a:latin typeface="Arial"/>
               </a:rPr>
-              <a:t>zero axial</a:t>
-            </a:r>
-          </a:p>
+              <a:t>47.2 MPa</a:t>
+            </a:r>
+          </a:p>
+        </p:txBody>
+      </p:sp>
+      <p:sp>
+        <p:nvSpPr>
+          <p:cNvPr id="22" name="C3-E23 text 20" descr="sci-ppt:o020"/>
+          <p:cNvSpPr txBox="1"/>
+          <p:nvPr/>
+        </p:nvSpPr>
+        <p:spPr>
+          <a:xfrm>
+            <a:off x="6583680" y="3017520"/>
+            <a:ext cx="5212080" cy="433070"/>
+          </a:xfrm>
+          <a:prstGeom prst="rect">
+            <a:avLst/>
+          </a:prstGeom>
+          <a:noFill/>
+          <a:effectLst/>
+        </p:spPr>
+        <p:txBody>
+          <a:bodyPr wrap="none" lIns="18288" rIns="18288" tIns="18288" bIns="18288" anchor="t">
+            <a:spAutoFit/>
+          </a:bodyPr>
+          <a:lstStyle/>
           <a:p>
             <a:pPr algn="l">
               <a:spcAft>
@@ -3521,27 +3845,43 @@
               </a:spcAft>
             </a:pPr>
             <a:r>
-              <a:rPr sz="1600" b="0" i="0">
+              <a:rPr sz="1250" b="0" i="0">
                 <a:solidFill>
                   <a:srgbClr val="E7F0F3"/>
                 </a:solidFill>
                 <a:latin typeface="Arial"/>
               </a:rPr>
-              <a:t>outlet momentum</a:t>
-            </a:r>
-          </a:p>
-        </p:txBody>
-      </p:sp>
-      <p:sp>
-        <p:nvSpPr>
-          <p:cNvPr id="15" name="C3-E23 text 13" descr="sci-ppt:o013"/>
+              <a:t>Dynamic pressure is a scale; it is not a pressure applied</a:t>
+            </a:r>
+          </a:p>
+          <a:p>
+            <a:pPr algn="l">
+              <a:spcAft>
+                <a:spcPts val="0"/>
+              </a:spcAft>
+            </a:pPr>
+            <a:r>
+              <a:rPr sz="1250" b="0" i="0">
+                <a:solidFill>
+                  <a:srgbClr val="E7F0F3"/>
+                </a:solidFill>
+                <a:latin typeface="Arial"/>
+              </a:rPr>
+              <a:t>over the whole surface.</a:t>
+            </a:r>
+          </a:p>
+        </p:txBody>
+      </p:sp>
+      <p:sp>
+        <p:nvSpPr>
+          <p:cNvPr id="23" name="C3-E23 text 21" descr="sci-ppt:o021"/>
           <p:cNvSpPr txBox="1"/>
           <p:nvPr/>
         </p:nvSpPr>
         <p:spPr>
           <a:xfrm>
-            <a:off x="914400" y="3337560"/>
-            <a:ext cx="10058400" cy="411480"/>
+            <a:off x="6583680" y="3840480"/>
+            <a:ext cx="5212080" cy="626745"/>
           </a:xfrm>
           <a:prstGeom prst="rect">
             <a:avLst/>
@@ -3550,7 +3890,7 @@
           <a:effectLst/>
         </p:spPr>
         <p:txBody>
-          <a:bodyPr wrap="square" lIns="27432" rIns="27432" tIns="18288" bIns="18288" anchor="ctr">
+          <a:bodyPr wrap="none" lIns="18288" rIns="18288" tIns="18288" bIns="18288" anchor="t">
             <a:spAutoFit/>
           </a:bodyPr>
           <a:lstStyle/>
@@ -3561,49 +3901,59 @@
               </a:spcAft>
             </a:pPr>
             <a:r>
-              <a:rPr sz="1800" b="0" i="0">
+              <a:rPr sz="1250" b="0" i="0">
                 <a:solidFill>
-                  <a:srgbClr val="8EDBD4"/>
+                  <a:srgbClr val="F2B880"/>
                 </a:solidFill>
                 <a:latin typeface="Arial"/>
               </a:rPr>
-              <a:t>F_steady = ρ A_j U_j²; q_j = ρ U_j²/2 is a pressure scale.</a:t>
-            </a:r>
-          </a:p>
-        </p:txBody>
-      </p:sp>
-      <p:cxnSp>
-        <p:nvCxnSpPr>
-          <p:cNvPr id="16" name="C3-E23 line 14" descr="sci-ppt:o014"/>
-          <p:cNvCxnSpPr/>
-          <p:nvPr/>
-        </p:nvCxnSpPr>
-        <p:spPr>
-          <a:xfrm>
-            <a:off x="274320" y="3977639"/>
-            <a:ext cx="11612880" cy="0"/>
-          </a:xfrm>
-          <a:prstGeom prst="line">
-            <a:avLst/>
-          </a:prstGeom>
-          <a:ln w="12700">
-            <a:solidFill>
-              <a:srgbClr val="405967"/>
-            </a:solidFill>
-          </a:ln>
-          <a:effectLst/>
-        </p:spPr>
-      </p:cxnSp>
-      <p:sp>
-        <p:nvSpPr>
-          <p:cNvPr id="17" name="C3-E23 text 15" descr="sci-ppt:o015"/>
+              <a:t>Steady force follows from momentum flux with the same Uⱼ, ρ,</a:t>
+            </a:r>
+          </a:p>
+          <a:p>
+            <a:pPr algn="l">
+              <a:spcAft>
+                <a:spcPts val="0"/>
+              </a:spcAft>
+            </a:pPr>
+            <a:r>
+              <a:rPr sz="1250" b="0" i="0">
+                <a:solidFill>
+                  <a:srgbClr val="F2B880"/>
+                </a:solidFill>
+                <a:latin typeface="Arial"/>
+              </a:rPr>
+              <a:t>Aⱼ used elsewhere. The first nanoseconds of impact (second</a:t>
+            </a:r>
+          </a:p>
+          <a:p>
+            <a:pPr algn="l">
+              <a:spcAft>
+                <a:spcPts val="0"/>
+              </a:spcAft>
+            </a:pPr>
+            <a:r>
+              <a:rPr sz="1250" b="0" i="0">
+                <a:solidFill>
+                  <a:srgbClr val="F2B880"/>
+                </a:solidFill>
+                <a:latin typeface="Arial"/>
+              </a:rPr>
+              <a:t>bar) are about 90 times larger.</a:t>
+            </a:r>
+          </a:p>
+        </p:txBody>
+      </p:sp>
+      <p:sp>
+        <p:nvSpPr>
+          <p:cNvPr id="24" name="C3-E23 text 22" descr="sci-ppt:o022"/>
           <p:cNvSpPr txBox="1"/>
           <p:nvPr/>
         </p:nvSpPr>
         <p:spPr>
           <a:xfrm>
-            <a:off x="320040" y="4096512"/>
-            <a:ext cx="5715000" cy="246888"/>
+            <a:off x="320040" y="6510528"/>
+            <a:ext cx="11521440" cy="200660"/>
           </a:xfrm>
           <a:prstGeom prst="rect">
             <a:avLst/>
@@ -3612,327 +3962,7 @@
           <a:effectLst/>
         </p:spPr>
         <p:txBody>
-          <a:bodyPr wrap="square" lIns="27432" rIns="27432" tIns="18288" bIns="18288" anchor="ctr">
-            <a:spAutoFit/>
-          </a:bodyPr>
-          <a:lstStyle/>
-          <a:p>
-            <a:pPr algn="l">
-              <a:spcAft>
-                <a:spcPts val="0"/>
-              </a:spcAft>
-            </a:pPr>
-            <a:r>
-              <a:rPr sz="1150" b="0" i="0">
-                <a:solidFill>
-                  <a:srgbClr val="B4C7D2"/>
-                </a:solidFill>
-                <a:latin typeface="Arial"/>
-              </a:rPr>
-              <a:t>• U_j incident jet speed</a:t>
-            </a:r>
-          </a:p>
-        </p:txBody>
-      </p:sp>
-      <p:sp>
-        <p:nvSpPr>
-          <p:cNvPr id="18" name="C3-E23 text 16" descr="sci-ppt:o016"/>
-          <p:cNvSpPr txBox="1"/>
-          <p:nvPr/>
-        </p:nvSpPr>
-        <p:spPr>
-          <a:xfrm>
-            <a:off x="6217920" y="4096512"/>
-            <a:ext cx="5715000" cy="246888"/>
-          </a:xfrm>
-          <a:prstGeom prst="rect">
-            <a:avLst/>
-          </a:prstGeom>
-          <a:noFill/>
-          <a:effectLst/>
-        </p:spPr>
-        <p:txBody>
-          <a:bodyPr wrap="square" lIns="27432" rIns="27432" tIns="18288" bIns="18288" anchor="ctr">
-            <a:spAutoFit/>
-          </a:bodyPr>
-          <a:lstStyle/>
-          <a:p>
-            <a:pPr algn="l">
-              <a:spcAft>
-                <a:spcPts val="0"/>
-              </a:spcAft>
-            </a:pPr>
-            <a:r>
-              <a:rPr sz="1150" b="0" i="0">
-                <a:solidFill>
-                  <a:srgbClr val="B4C7D2"/>
-                </a:solidFill>
-                <a:latin typeface="Arial"/>
-              </a:rPr>
-              <a:t>• A_j incident area</a:t>
-            </a:r>
-          </a:p>
-        </p:txBody>
-      </p:sp>
-      <p:sp>
-        <p:nvSpPr>
-          <p:cNvPr id="19" name="C3-E23 text 17" descr="sci-ppt:o017"/>
-          <p:cNvSpPr txBox="1"/>
-          <p:nvPr/>
-        </p:nvSpPr>
-        <p:spPr>
-          <a:xfrm>
-            <a:off x="320040" y="4329684"/>
-            <a:ext cx="5715000" cy="246888"/>
-          </a:xfrm>
-          <a:prstGeom prst="rect">
-            <a:avLst/>
-          </a:prstGeom>
-          <a:noFill/>
-          <a:effectLst/>
-        </p:spPr>
-        <p:txBody>
-          <a:bodyPr wrap="square" lIns="27432" rIns="27432" tIns="18288" bIns="18288" anchor="ctr">
-            <a:spAutoFit/>
-          </a:bodyPr>
-          <a:lstStyle/>
-          <a:p>
-            <a:pPr algn="l">
-              <a:spcAft>
-                <a:spcPts val="0"/>
-              </a:spcAft>
-            </a:pPr>
-            <a:r>
-              <a:rPr sz="1150" b="0" i="0">
-                <a:solidFill>
-                  <a:srgbClr val="B4C7D2"/>
-                </a:solidFill>
-                <a:latin typeface="Arial"/>
-              </a:rPr>
-              <a:t>• ρ liquid; ṁ = ρA_jU_j</a:t>
-            </a:r>
-          </a:p>
-        </p:txBody>
-      </p:sp>
-      <p:sp>
-        <p:nvSpPr>
-          <p:cNvPr id="20" name="C3-E23 text 18" descr="sci-ppt:o018"/>
-          <p:cNvSpPr txBox="1"/>
-          <p:nvPr/>
-        </p:nvSpPr>
-        <p:spPr>
-          <a:xfrm>
-            <a:off x="6217920" y="4329684"/>
-            <a:ext cx="5715000" cy="246888"/>
-          </a:xfrm>
-          <a:prstGeom prst="rect">
-            <a:avLst/>
-          </a:prstGeom>
-          <a:noFill/>
-          <a:effectLst/>
-        </p:spPr>
-        <p:txBody>
-          <a:bodyPr wrap="square" lIns="27432" rIns="27432" tIns="18288" bIns="18288" anchor="ctr">
-            <a:spAutoFit/>
-          </a:bodyPr>
-          <a:lstStyle/>
-          <a:p>
-            <a:pPr algn="l">
-              <a:spcAft>
-                <a:spcPts val="0"/>
-              </a:spcAft>
-            </a:pPr>
-            <a:r>
-              <a:rPr sz="1150" b="0" i="0">
-                <a:solidFill>
-                  <a:srgbClr val="B4C7D2"/>
-                </a:solidFill>
-                <a:latin typeface="Arial"/>
-              </a:rPr>
-              <a:t>• q_j dynamic-pressure scale</a:t>
-            </a:r>
-          </a:p>
-        </p:txBody>
-      </p:sp>
-      <p:sp>
-        <p:nvSpPr>
-          <p:cNvPr id="21" name="C3-E23 text 19" descr="sci-ppt:o019"/>
-          <p:cNvSpPr txBox="1"/>
-          <p:nvPr/>
-        </p:nvSpPr>
-        <p:spPr>
-          <a:xfrm>
-            <a:off x="320040" y="4562856"/>
-            <a:ext cx="5715000" cy="246888"/>
-          </a:xfrm>
-          <a:prstGeom prst="rect">
-            <a:avLst/>
-          </a:prstGeom>
-          <a:noFill/>
-          <a:effectLst/>
-        </p:spPr>
-        <p:txBody>
-          <a:bodyPr wrap="square" lIns="27432" rIns="27432" tIns="18288" bIns="18288" anchor="ctr">
-            <a:spAutoFit/>
-          </a:bodyPr>
-          <a:lstStyle/>
-          <a:p>
-            <a:pPr algn="l">
-              <a:spcAft>
-                <a:spcPts val="0"/>
-              </a:spcAft>
-            </a:pPr>
-            <a:r>
-              <a:rPr sz="1150" b="0" i="0">
-                <a:solidFill>
-                  <a:srgbClr val="B4C7D2"/>
-                </a:solidFill>
-                <a:latin typeface="Arial"/>
-              </a:rPr>
-              <a:t>• F_steady receiver force</a:t>
-            </a:r>
-          </a:p>
-        </p:txBody>
-      </p:sp>
-      <p:sp>
-        <p:nvSpPr>
-          <p:cNvPr id="22" name="C3-E23 text 20" descr="sci-ppt:o020"/>
-          <p:cNvSpPr txBox="1"/>
-          <p:nvPr/>
-        </p:nvSpPr>
-        <p:spPr>
-          <a:xfrm>
-            <a:off x="6217920" y="4562856"/>
-            <a:ext cx="5715000" cy="246888"/>
-          </a:xfrm>
-          <a:prstGeom prst="rect">
-            <a:avLst/>
-          </a:prstGeom>
-          <a:noFill/>
-          <a:effectLst/>
-        </p:spPr>
-        <p:txBody>
-          <a:bodyPr wrap="square" lIns="27432" rIns="27432" tIns="18288" bIns="18288" anchor="ctr">
-            <a:spAutoFit/>
-          </a:bodyPr>
-          <a:lstStyle/>
-          <a:p>
-            <a:pPr algn="l">
-              <a:spcAft>
-                <a:spcPts val="0"/>
-              </a:spcAft>
-            </a:pPr>
-            <a:r>
-              <a:rPr sz="1150" b="0" i="0">
-                <a:solidFill>
-                  <a:srgbClr val="B4C7D2"/>
-                </a:solidFill>
-                <a:latin typeface="Arial"/>
-              </a:rPr>
-              <a:t>• Lateral outlet carries zero axial momentum</a:t>
-            </a:r>
-          </a:p>
-        </p:txBody>
-      </p:sp>
-      <p:sp>
-        <p:nvSpPr>
-          <p:cNvPr id="23" name="C3-E23 text 21" descr="sci-ppt:o021"/>
-          <p:cNvSpPr txBox="1"/>
-          <p:nvPr/>
-        </p:nvSpPr>
-        <p:spPr>
-          <a:xfrm>
-            <a:off x="320040" y="5596128"/>
-            <a:ext cx="11430000" cy="292608"/>
-          </a:xfrm>
-          <a:prstGeom prst="rect">
-            <a:avLst/>
-          </a:prstGeom>
-          <a:noFill/>
-          <a:effectLst/>
-        </p:spPr>
-        <p:txBody>
-          <a:bodyPr wrap="square" lIns="27432" rIns="27432" tIns="18288" bIns="18288" anchor="ctr">
-            <a:spAutoFit/>
-          </a:bodyPr>
-          <a:lstStyle/>
-          <a:p>
-            <a:pPr algn="l">
-              <a:spcAft>
-                <a:spcPts val="0"/>
-              </a:spcAft>
-            </a:pPr>
-            <a:r>
-              <a:rPr sz="1150" b="0" i="0">
-                <a:solidFill>
-                  <a:srgbClr val="8EDBD4"/>
-                </a:solidFill>
-                <a:latin typeface="Arial"/>
-              </a:rPr>
-              <a:t>q_j is a scale, not a universal mean or local traction</a:t>
-            </a:r>
-          </a:p>
-        </p:txBody>
-      </p:sp>
-      <p:sp>
-        <p:nvSpPr>
-          <p:cNvPr id="24" name="C3-E23 text 22" descr="sci-ppt:o022"/>
-          <p:cNvSpPr txBox="1"/>
-          <p:nvPr/>
-        </p:nvSpPr>
-        <p:spPr>
-          <a:xfrm>
-            <a:off x="320040" y="5870448"/>
-            <a:ext cx="11430000" cy="292608"/>
-          </a:xfrm>
-          <a:prstGeom prst="rect">
-            <a:avLst/>
-          </a:prstGeom>
-          <a:noFill/>
-          <a:effectLst/>
-        </p:spPr>
-        <p:txBody>
-          <a:bodyPr wrap="square" lIns="27432" rIns="27432" tIns="18288" bIns="18288" anchor="ctr">
-            <a:spAutoFit/>
-          </a:bodyPr>
-          <a:lstStyle/>
-          <a:p>
-            <a:pPr algn="l">
-              <a:spcAft>
-                <a:spcPts val="0"/>
-              </a:spcAft>
-            </a:pPr>
-            <a:r>
-              <a:rPr sz="1150" b="0" i="0">
-                <a:solidFill>
-                  <a:srgbClr val="8EDBD4"/>
-                </a:solidFill>
-                <a:latin typeface="Arial"/>
-              </a:rPr>
-              <a:t>A moving receiver changes relative speed and force</a:t>
-            </a:r>
-          </a:p>
-        </p:txBody>
-      </p:sp>
-      <p:sp>
-        <p:nvSpPr>
-          <p:cNvPr id="25" name="C3-E23 text 23" descr="sci-ppt:o023"/>
-          <p:cNvSpPr txBox="1"/>
-          <p:nvPr/>
-        </p:nvSpPr>
-        <p:spPr>
-          <a:xfrm>
-            <a:off x="320040" y="6473952"/>
-            <a:ext cx="11430000" cy="256032"/>
-          </a:xfrm>
-          <a:prstGeom prst="rect">
-            <a:avLst/>
-          </a:prstGeom>
-          <a:noFill/>
-          <a:effectLst/>
-        </p:spPr>
-        <p:txBody>
-          <a:bodyPr wrap="square" lIns="27432" rIns="27432" tIns="18288" bIns="18288" anchor="ctr">
+          <a:bodyPr wrap="none" lIns="18288" rIns="18288" tIns="18288" bIns="18288" anchor="t">
             <a:spAutoFit/>
           </a:bodyPr>
           <a:lstStyle/>
@@ -3949,7 +3979,7 @@
                 </a:solidFill>
                 <a:latin typeface="Arial"/>
               </a:rPr>
-              <a:t>Model schematic; geometry is not to scale.</a:t>
+              <a:t>Eq. C3-E23 with the declared jet: Uⱼ = 31.915 m/s, dⱼ = 10 µm, ρ = 1000 kg/m³, c = 1480 m/s.</a:t>
             </a:r>
           </a:p>
         </p:txBody>
